--- a/highlevelimpact.pptx
+++ b/highlevelimpact.pptx
@@ -3321,1163 +3321,282 @@
           <a:chExt cx="0" cy="0"/>
         </a:xfrm>
       </p:grpSpPr>
-      <p:graphicFrame>
-        <p:nvGraphicFramePr>
-          <p:cNvPr id="4" name="Table 3">
-            <a:extLst>
-              <a:ext uri="{FF2B5EF4-FFF2-40B4-BE49-F238E27FC236}">
-                <a16:creationId xmlns:a16="http://schemas.microsoft.com/office/drawing/2014/main" id="{7B2B8BF7-1B50-4043-8391-D515F4DC1982}"/>
-              </a:ext>
-            </a:extLst>
-          </p:cNvPr>
-          <p:cNvGraphicFramePr>
-            <a:graphicFrameLocks noGrp="1"/>
-          </p:cNvGraphicFramePr>
-          <p:nvPr>
-            <p:extLst>
-              <p:ext uri="{D42A27DB-BD31-4B8C-83A1-F6EECF244321}">
-                <p14:modId xmlns:p14="http://schemas.microsoft.com/office/powerpoint/2010/main" val="167902575"/>
-              </p:ext>
-            </p:extLst>
-          </p:nvPr>
-        </p:nvGraphicFramePr>
-        <p:xfrm>
-          <a:off x="879676" y="983848"/>
-          <a:ext cx="9664860" cy="4812916"/>
-        </p:xfrm>
-        <a:graphic>
-          <a:graphicData uri="http://schemas.openxmlformats.org/drawingml/2006/table">
-            <a:tbl>
-              <a:tblPr/>
-              <a:tblGrid>
-                <a:gridCol w="1610810">
-                  <a:extLst>
-                    <a:ext uri="{9D8B030D-6E8A-4147-A177-3AD203B41FA5}">
-                      <a16:colId xmlns:a16="http://schemas.microsoft.com/office/drawing/2014/main" val="1414789742"/>
-                    </a:ext>
-                  </a:extLst>
-                </a:gridCol>
-                <a:gridCol w="1610810">
-                  <a:extLst>
-                    <a:ext uri="{9D8B030D-6E8A-4147-A177-3AD203B41FA5}">
-                      <a16:colId xmlns:a16="http://schemas.microsoft.com/office/drawing/2014/main" val="1462201133"/>
-                    </a:ext>
-                  </a:extLst>
-                </a:gridCol>
-                <a:gridCol w="1610810">
-                  <a:extLst>
-                    <a:ext uri="{9D8B030D-6E8A-4147-A177-3AD203B41FA5}">
-                      <a16:colId xmlns:a16="http://schemas.microsoft.com/office/drawing/2014/main" val="2773119606"/>
-                    </a:ext>
-                  </a:extLst>
-                </a:gridCol>
-                <a:gridCol w="1610810">
-                  <a:extLst>
-                    <a:ext uri="{9D8B030D-6E8A-4147-A177-3AD203B41FA5}">
-                      <a16:colId xmlns:a16="http://schemas.microsoft.com/office/drawing/2014/main" val="2899914499"/>
-                    </a:ext>
-                  </a:extLst>
-                </a:gridCol>
-                <a:gridCol w="1610810">
-                  <a:extLst>
-                    <a:ext uri="{9D8B030D-6E8A-4147-A177-3AD203B41FA5}">
-                      <a16:colId xmlns:a16="http://schemas.microsoft.com/office/drawing/2014/main" val="1774803873"/>
-                    </a:ext>
-                  </a:extLst>
-                </a:gridCol>
-                <a:gridCol w="1610810">
-                  <a:extLst>
-                    <a:ext uri="{9D8B030D-6E8A-4147-A177-3AD203B41FA5}">
-                      <a16:colId xmlns:a16="http://schemas.microsoft.com/office/drawing/2014/main" val="2288586999"/>
-                    </a:ext>
-                  </a:extLst>
-                </a:gridCol>
-              </a:tblGrid>
-              <a:tr h="145846">
-                <a:tc>
-                  <a:txBody>
-                    <a:bodyPr/>
-                    <a:lstStyle/>
-                    <a:p>
-                      <a:r>
-                        <a:rPr lang="en-GB" sz="400"/>
-                        <a:t>#</a:t>
-                      </a:r>
-                    </a:p>
-                  </a:txBody>
-                  <a:tcPr marL="18837" marR="18837" marT="9418" marB="9418" anchor="ctr">
-                    <a:lnL>
-                      <a:noFill/>
-                    </a:lnL>
-                    <a:lnR>
-                      <a:noFill/>
-                    </a:lnR>
-                    <a:lnT>
-                      <a:noFill/>
-                    </a:lnT>
-                    <a:lnB>
-                      <a:noFill/>
-                    </a:lnB>
-                  </a:tcPr>
-                </a:tc>
-                <a:tc>
-                  <a:txBody>
-                    <a:bodyPr/>
-                    <a:lstStyle/>
-                    <a:p>
-                      <a:r>
-                        <a:rPr lang="en-GB" sz="400"/>
-                        <a:t>Duplicate scenario</a:t>
-                      </a:r>
-                    </a:p>
-                  </a:txBody>
-                  <a:tcPr marL="18837" marR="18837" marT="9418" marB="9418" anchor="ctr">
-                    <a:lnL>
-                      <a:noFill/>
-                    </a:lnL>
-                    <a:lnR>
-                      <a:noFill/>
-                    </a:lnR>
-                    <a:lnT>
-                      <a:noFill/>
-                    </a:lnT>
-                    <a:lnB>
-                      <a:noFill/>
-                    </a:lnB>
-                  </a:tcPr>
-                </a:tc>
-                <a:tc>
-                  <a:txBody>
-                    <a:bodyPr/>
-                    <a:lstStyle/>
-                    <a:p>
-                      <a:r>
-                        <a:rPr lang="en-GB" sz="400"/>
-                        <a:t>High-level behaviour</a:t>
-                      </a:r>
-                    </a:p>
-                  </a:txBody>
-                  <a:tcPr marL="18837" marR="18837" marT="9418" marB="9418" anchor="ctr">
-                    <a:lnL>
-                      <a:noFill/>
-                    </a:lnL>
-                    <a:lnR>
-                      <a:noFill/>
-                    </a:lnR>
-                    <a:lnT>
-                      <a:noFill/>
-                    </a:lnT>
-                    <a:lnB>
-                      <a:noFill/>
-                    </a:lnB>
-                  </a:tcPr>
-                </a:tc>
-                <a:tc>
-                  <a:txBody>
-                    <a:bodyPr/>
-                    <a:lstStyle/>
-                    <a:p>
-                      <a:r>
-                        <a:rPr lang="en-GB" sz="400"/>
-                        <a:t>Why it happens / classification</a:t>
-                      </a:r>
-                    </a:p>
-                  </a:txBody>
-                  <a:tcPr marL="18837" marR="18837" marT="9418" marB="9418" anchor="ctr">
-                    <a:lnL>
-                      <a:noFill/>
-                    </a:lnL>
-                    <a:lnR>
-                      <a:noFill/>
-                    </a:lnR>
-                    <a:lnT>
-                      <a:noFill/>
-                    </a:lnT>
-                    <a:lnB>
-                      <a:noFill/>
-                    </a:lnB>
-                  </a:tcPr>
-                </a:tc>
-                <a:tc>
-                  <a:txBody>
-                    <a:bodyPr/>
-                    <a:lstStyle/>
-                    <a:p>
-                      <a:r>
-                        <a:rPr lang="en-GB" sz="400"/>
-                        <a:t>Current BICoE handling</a:t>
-                      </a:r>
-                    </a:p>
-                  </a:txBody>
-                  <a:tcPr marL="18837" marR="18837" marT="9418" marB="9418" anchor="ctr">
-                    <a:lnL>
-                      <a:noFill/>
-                    </a:lnL>
-                    <a:lnR>
-                      <a:noFill/>
-                    </a:lnR>
-                    <a:lnT>
-                      <a:noFill/>
-                    </a:lnT>
-                    <a:lnB>
-                      <a:noFill/>
-                    </a:lnB>
-                  </a:tcPr>
-                </a:tc>
-                <a:tc>
-                  <a:txBody>
-                    <a:bodyPr/>
-                    <a:lstStyle/>
-                    <a:p>
-                      <a:r>
-                        <a:rPr lang="en-GB" sz="400"/>
-                        <a:t>Main impact</a:t>
-                      </a:r>
-                    </a:p>
-                  </a:txBody>
-                  <a:tcPr marL="18837" marR="18837" marT="9418" marB="9418" anchor="ctr">
-                    <a:lnL>
-                      <a:noFill/>
-                    </a:lnL>
-                    <a:lnR>
-                      <a:noFill/>
-                    </a:lnR>
-                    <a:lnT>
-                      <a:noFill/>
-                    </a:lnT>
-                    <a:lnB>
-                      <a:noFill/>
-                    </a:lnB>
-                  </a:tcPr>
-                </a:tc>
-                <a:extLst>
-                  <a:ext uri="{0D108BD9-81ED-4DB2-BD59-A6C34878D82A}">
-                    <a16:rowId xmlns:a16="http://schemas.microsoft.com/office/drawing/2014/main" val="2969602175"/>
-                  </a:ext>
-                </a:extLst>
-              </a:tr>
-              <a:tr h="770900">
-                <a:tc>
-                  <a:txBody>
-                    <a:bodyPr/>
-                    <a:lstStyle/>
-                    <a:p>
-                      <a:r>
-                        <a:rPr lang="en-GB" sz="400" b="1"/>
-                        <a:t>1</a:t>
-                      </a:r>
-                      <a:endParaRPr lang="en-GB" sz="400"/>
-                    </a:p>
-                  </a:txBody>
-                  <a:tcPr marL="18837" marR="18837" marT="9418" marB="9418" anchor="ctr">
-                    <a:lnL>
-                      <a:noFill/>
-                    </a:lnL>
-                    <a:lnR>
-                      <a:noFill/>
-                    </a:lnR>
-                    <a:lnT>
-                      <a:noFill/>
-                    </a:lnT>
-                    <a:lnB>
-                      <a:noFill/>
-                    </a:lnB>
-                  </a:tcPr>
-                </a:tc>
-                <a:tc>
-                  <a:txBody>
-                    <a:bodyPr/>
-                    <a:lstStyle/>
-                    <a:p>
-                      <a:r>
-                        <a:rPr lang="en-GB" sz="400" b="1"/>
-                        <a:t>Same-day replay duplicate</a:t>
-                      </a:r>
-                      <a:endParaRPr lang="en-GB" sz="400"/>
-                    </a:p>
-                  </a:txBody>
-                  <a:tcPr marL="18837" marR="18837" marT="9418" marB="9418" anchor="ctr">
-                    <a:lnL>
-                      <a:noFill/>
-                    </a:lnL>
-                    <a:lnR>
-                      <a:noFill/>
-                    </a:lnR>
-                    <a:lnT>
-                      <a:noFill/>
-                    </a:lnT>
-                    <a:lnB>
-                      <a:noFill/>
-                    </a:lnB>
-                  </a:tcPr>
-                </a:tc>
-                <a:tc>
-                  <a:txBody>
-                    <a:bodyPr/>
-                    <a:lstStyle/>
-                    <a:p>
-                      <a:r>
-                        <a:rPr lang="en-GB" sz="400"/>
-                        <a:t>The same logical MQS message is received multiple times on the same day. Each physical copy normally has a slightly different enqueuedTime / processing timestamp.</a:t>
-                      </a:r>
-                    </a:p>
-                  </a:txBody>
-                  <a:tcPr marL="18837" marR="18837" marT="9418" marB="9418" anchor="ctr">
-                    <a:lnL>
-                      <a:noFill/>
-                    </a:lnL>
-                    <a:lnR>
-                      <a:noFill/>
-                    </a:lnR>
-                    <a:lnT>
-                      <a:noFill/>
-                    </a:lnT>
-                    <a:lnB>
-                      <a:noFill/>
-                    </a:lnB>
-                  </a:tcPr>
-                </a:tc>
-                <a:tc>
-                  <a:txBody>
-                    <a:bodyPr/>
-                    <a:lstStyle/>
-                    <a:p>
-                      <a:r>
-                        <a:rPr lang="en-GB" sz="400"/>
-                        <a:t>Upstream retry/replay behaviour.</a:t>
-                      </a:r>
-                    </a:p>
-                  </a:txBody>
-                  <a:tcPr marL="18837" marR="18837" marT="9418" marB="9418" anchor="ctr">
-                    <a:lnL>
-                      <a:noFill/>
-                    </a:lnL>
-                    <a:lnR>
-                      <a:noFill/>
-                    </a:lnR>
-                    <a:lnT>
-                      <a:noFill/>
-                    </a:lnT>
-                    <a:lnB>
-                      <a:noFill/>
-                    </a:lnB>
-                  </a:tcPr>
-                </a:tc>
-                <a:tc>
-                  <a:txBody>
-                    <a:bodyPr/>
-                    <a:lstStyle/>
-                    <a:p>
-                      <a:r>
-                        <a:rPr lang="en-GB" sz="400" b="1"/>
-                        <a:t>Handled by the current ingestion deduplication.</a:t>
-                      </a:r>
-                      <a:r>
-                        <a:rPr lang="en-GB" sz="400"/>
-                        <a:t> Only one logical record is expected to progress beyond ingestion.</a:t>
-                      </a:r>
-                    </a:p>
-                  </a:txBody>
-                  <a:tcPr marL="18837" marR="18837" marT="9418" marB="9418" anchor="ctr">
-                    <a:lnL>
-                      <a:noFill/>
-                    </a:lnL>
-                    <a:lnR>
-                      <a:noFill/>
-                    </a:lnR>
-                    <a:lnT>
-                      <a:noFill/>
-                    </a:lnT>
-                    <a:lnB>
-                      <a:noFill/>
-                    </a:lnB>
-                  </a:tcPr>
-                </a:tc>
-                <a:tc>
-                  <a:txBody>
-                    <a:bodyPr/>
-                    <a:lstStyle/>
-                    <a:p>
-                      <a:r>
-                        <a:rPr lang="en-GB" sz="400"/>
-                        <a:t>Multiple copies may be visible in Event Hub/EFST, but </a:t>
-                      </a:r>
-                      <a:r>
-                        <a:rPr lang="en-GB" sz="400" b="1"/>
-                        <a:t>no expected duplicate impact in DLT, Silverish, Silver, Pricing ART, Gold or DVLA</a:t>
-                      </a:r>
-                      <a:r>
-                        <a:rPr lang="en-GB" sz="400"/>
-                        <a:t> if deduplication works as designed.</a:t>
-                      </a:r>
-                    </a:p>
-                  </a:txBody>
-                  <a:tcPr marL="18837" marR="18837" marT="9418" marB="9418" anchor="ctr">
-                    <a:lnL>
-                      <a:noFill/>
-                    </a:lnL>
-                    <a:lnR>
-                      <a:noFill/>
-                    </a:lnR>
-                    <a:lnT>
-                      <a:noFill/>
-                    </a:lnT>
-                    <a:lnB>
-                      <a:noFill/>
-                    </a:lnB>
-                  </a:tcPr>
-                </a:tc>
-                <a:extLst>
-                  <a:ext uri="{0D108BD9-81ED-4DB2-BD59-A6C34878D82A}">
-                    <a16:rowId xmlns:a16="http://schemas.microsoft.com/office/drawing/2014/main" val="1617991434"/>
-                  </a:ext>
-                </a:extLst>
-              </a:tr>
-              <a:tr h="1083427">
-                <a:tc>
-                  <a:txBody>
-                    <a:bodyPr/>
-                    <a:lstStyle/>
-                    <a:p>
-                      <a:r>
-                        <a:rPr lang="en-GB" sz="400" b="1"/>
-                        <a:t>2</a:t>
-                      </a:r>
-                      <a:endParaRPr lang="en-GB" sz="400"/>
-                    </a:p>
-                  </a:txBody>
-                  <a:tcPr marL="18837" marR="18837" marT="9418" marB="9418" anchor="ctr">
-                    <a:lnL>
-                      <a:noFill/>
-                    </a:lnL>
-                    <a:lnR>
-                      <a:noFill/>
-                    </a:lnR>
-                    <a:lnT>
-                      <a:noFill/>
-                    </a:lnT>
-                    <a:lnB>
-                      <a:noFill/>
-                    </a:lnB>
-                  </a:tcPr>
-                </a:tc>
-                <a:tc>
-                  <a:txBody>
-                    <a:bodyPr/>
-                    <a:lstStyle/>
-                    <a:p>
-                      <a:r>
-                        <a:rPr lang="en-GB" sz="400" b="1"/>
-                        <a:t>Cross-day replay duplicate</a:t>
-                      </a:r>
-                      <a:endParaRPr lang="en-GB" sz="400"/>
-                    </a:p>
-                  </a:txBody>
-                  <a:tcPr marL="18837" marR="18837" marT="9418" marB="9418" anchor="ctr">
-                    <a:lnL>
-                      <a:noFill/>
-                    </a:lnL>
-                    <a:lnR>
-                      <a:noFill/>
-                    </a:lnR>
-                    <a:lnT>
-                      <a:noFill/>
-                    </a:lnT>
-                    <a:lnB>
-                      <a:noFill/>
-                    </a:lnB>
-                  </a:tcPr>
-                </a:tc>
-                <a:tc>
-                  <a:txBody>
-                    <a:bodyPr/>
-                    <a:lstStyle/>
-                    <a:p>
-                      <a:r>
-                        <a:rPr lang="en-GB" sz="400"/>
-                        <a:t>The original message is received on Day 1 and the same logical message is replayed on Day 2 or later with a new Event Hub </a:t>
-                      </a:r>
-                      <a:r>
-                        <a:rPr lang="en-GB" sz="400" dirty="0" err="1"/>
-                        <a:t>enqueuedTime</a:t>
-                      </a:r>
-                      <a:r>
-                        <a:rPr lang="en-GB" sz="400" dirty="0"/>
-                        <a:t>.</a:t>
-                      </a:r>
-                    </a:p>
-                  </a:txBody>
-                  <a:tcPr marL="18837" marR="18837" marT="9418" marB="9418" anchor="ctr">
-                    <a:lnL>
-                      <a:noFill/>
-                    </a:lnL>
-                    <a:lnR>
-                      <a:noFill/>
-                    </a:lnR>
-                    <a:lnT>
-                      <a:noFill/>
-                    </a:lnT>
-                    <a:lnB>
-                      <a:noFill/>
-                    </a:lnB>
-                  </a:tcPr>
-                </a:tc>
-                <a:tc>
-                  <a:txBody>
-                    <a:bodyPr/>
-                    <a:lstStyle/>
-                    <a:p>
-                      <a:r>
-                        <a:rPr lang="en-GB" sz="400"/>
-                        <a:t>Delayed replay, potentially associated with timeout/Blob recovery behaviour.</a:t>
-                      </a:r>
-                    </a:p>
-                  </a:txBody>
-                  <a:tcPr marL="18837" marR="18837" marT="9418" marB="9418" anchor="ctr">
-                    <a:lnL>
-                      <a:noFill/>
-                    </a:lnL>
-                    <a:lnR>
-                      <a:noFill/>
-                    </a:lnR>
-                    <a:lnT>
-                      <a:noFill/>
-                    </a:lnT>
-                    <a:lnB>
-                      <a:noFill/>
-                    </a:lnB>
-                  </a:tcPr>
-                </a:tc>
-                <a:tc>
-                  <a:txBody>
-                    <a:bodyPr/>
-                    <a:lstStyle/>
-                    <a:p>
-                      <a:r>
-                        <a:rPr lang="en-GB" sz="400" b="1"/>
-                        <a:t>Escapes the current ingestion deduplication</a:t>
-                      </a:r>
-                      <a:r>
-                        <a:rPr lang="en-GB" sz="400"/>
-                        <a:t> because the replay arrives outside the effective short deduplication/watermark window.</a:t>
-                      </a:r>
-                    </a:p>
-                  </a:txBody>
-                  <a:tcPr marL="18837" marR="18837" marT="9418" marB="9418" anchor="ctr">
-                    <a:lnL>
-                      <a:noFill/>
-                    </a:lnL>
-                    <a:lnR>
-                      <a:noFill/>
-                    </a:lnR>
-                    <a:lnT>
-                      <a:noFill/>
-                    </a:lnT>
-                    <a:lnB>
-                      <a:noFill/>
-                    </a:lnB>
-                  </a:tcPr>
-                </a:tc>
-                <a:tc>
-                  <a:txBody>
-                    <a:bodyPr/>
-                    <a:lstStyle/>
-                    <a:p>
-                      <a:r>
-                        <a:rPr lang="en-GB" sz="400"/>
-                        <a:t>Duplicate records can progress into </a:t>
-                      </a:r>
-                      <a:r>
-                        <a:rPr lang="en-GB" sz="400" b="1"/>
-                        <a:t>DLT/Silverish, Silver and downstream consumers</a:t>
-                      </a:r>
-                      <a:r>
-                        <a:rPr lang="en-GB" sz="400"/>
-                        <a:t>. Pricing ART can see duplicates through DLT-based views. At least one production sample has also shown propagation into Gold.</a:t>
-                      </a:r>
-                    </a:p>
-                  </a:txBody>
-                  <a:tcPr marL="18837" marR="18837" marT="9418" marB="9418" anchor="ctr">
-                    <a:lnL>
-                      <a:noFill/>
-                    </a:lnL>
-                    <a:lnR>
-                      <a:noFill/>
-                    </a:lnR>
-                    <a:lnT>
-                      <a:noFill/>
-                    </a:lnT>
-                    <a:lnB>
-                      <a:noFill/>
-                    </a:lnB>
-                  </a:tcPr>
-                </a:tc>
-                <a:extLst>
-                  <a:ext uri="{0D108BD9-81ED-4DB2-BD59-A6C34878D82A}">
-                    <a16:rowId xmlns:a16="http://schemas.microsoft.com/office/drawing/2014/main" val="2849123805"/>
-                  </a:ext>
-                </a:extLst>
-              </a:tr>
-              <a:tr h="1145933">
-                <a:tc>
-                  <a:txBody>
-                    <a:bodyPr/>
-                    <a:lstStyle/>
-                    <a:p>
-                      <a:r>
-                        <a:rPr lang="en-GB" sz="400" b="1"/>
-                        <a:t>3</a:t>
-                      </a:r>
-                      <a:endParaRPr lang="en-GB" sz="400"/>
-                    </a:p>
-                  </a:txBody>
-                  <a:tcPr marL="18837" marR="18837" marT="9418" marB="9418" anchor="ctr">
-                    <a:lnL>
-                      <a:noFill/>
-                    </a:lnL>
-                    <a:lnR>
-                      <a:noFill/>
-                    </a:lnR>
-                    <a:lnT>
-                      <a:noFill/>
-                    </a:lnT>
-                    <a:lnB>
-                      <a:noFill/>
-                    </a:lnB>
-                  </a:tcPr>
-                </a:tc>
-                <a:tc>
-                  <a:txBody>
-                    <a:bodyPr/>
-                    <a:lstStyle/>
-                    <a:p>
-                      <a:r>
-                        <a:rPr lang="en-GB" sz="400" b="1"/>
-                        <a:t>Same Quote + Message Type with different quoteStep</a:t>
-                      </a:r>
-                      <a:endParaRPr lang="en-GB" sz="400"/>
-                    </a:p>
-                  </a:txBody>
-                  <a:tcPr marL="18837" marR="18837" marT="9418" marB="9418" anchor="ctr">
-                    <a:lnL>
-                      <a:noFill/>
-                    </a:lnL>
-                    <a:lnR>
-                      <a:noFill/>
-                    </a:lnR>
-                    <a:lnT>
-                      <a:noFill/>
-                    </a:lnT>
-                    <a:lnB>
-                      <a:noFill/>
-                    </a:lnB>
-                  </a:tcPr>
-                </a:tc>
-                <a:tc>
-                  <a:txBody>
-                    <a:bodyPr/>
-                    <a:lstStyle/>
-                    <a:p>
-                      <a:r>
-                        <a:rPr lang="en-GB" sz="400"/>
-                        <a:t>The same MQSQuoteId + messageType is received more than once, but the records contain different quoteStep values.</a:t>
-                      </a:r>
-                    </a:p>
-                  </a:txBody>
-                  <a:tcPr marL="18837" marR="18837" marT="9418" marB="9418" anchor="ctr">
-                    <a:lnL>
-                      <a:noFill/>
-                    </a:lnL>
-                    <a:lnR>
-                      <a:noFill/>
-                    </a:lnR>
-                    <a:lnT>
-                      <a:noFill/>
-                    </a:lnT>
-                    <a:lnB>
-                      <a:noFill/>
-                    </a:lnB>
-                  </a:tcPr>
-                </a:tc>
-                <a:tc>
-                  <a:txBody>
-                    <a:bodyPr/>
-                    <a:lstStyle/>
-                    <a:p>
-                      <a:r>
-                        <a:rPr lang="en-GB" sz="400"/>
-                        <a:t>Considered a </a:t>
-                      </a:r>
-                      <a:r>
-                        <a:rPr lang="en-GB" sz="400" b="1"/>
-                        <a:t>source-data/source-processing defect</a:t>
-                      </a:r>
-                      <a:r>
-                        <a:rPr lang="en-GB" sz="400"/>
-                        <a:t>, rather than a straightforward duplicate. This pattern had previously been treated as fixed but was observed again in Production between approximately 8–30 September.</a:t>
-                      </a:r>
-                    </a:p>
-                  </a:txBody>
-                  <a:tcPr marL="18837" marR="18837" marT="9418" marB="9418" anchor="ctr">
-                    <a:lnL>
-                      <a:noFill/>
-                    </a:lnL>
-                    <a:lnR>
-                      <a:noFill/>
-                    </a:lnR>
-                    <a:lnT>
-                      <a:noFill/>
-                    </a:lnT>
-                    <a:lnB>
-                      <a:noFill/>
-                    </a:lnB>
-                  </a:tcPr>
-                </a:tc>
-                <a:tc>
-                  <a:txBody>
-                    <a:bodyPr/>
-                    <a:lstStyle/>
-                    <a:p>
-                      <a:r>
-                        <a:rPr lang="en-GB" sz="400" b="1"/>
-                        <a:t>Not removed by generic ingestion deduplication</a:t>
-                      </a:r>
-                      <a:r>
-                        <a:rPr lang="en-GB" sz="400"/>
-                        <a:t>, because the records are technically different.</a:t>
-                      </a:r>
-                    </a:p>
-                  </a:txBody>
-                  <a:tcPr marL="18837" marR="18837" marT="9418" marB="9418" anchor="ctr">
-                    <a:lnL>
-                      <a:noFill/>
-                    </a:lnL>
-                    <a:lnR>
-                      <a:noFill/>
-                    </a:lnR>
-                    <a:lnT>
-                      <a:noFill/>
-                    </a:lnT>
-                    <a:lnB>
-                      <a:noFill/>
-                    </a:lnB>
-                  </a:tcPr>
-                </a:tc>
-                <a:tc>
-                  <a:txBody>
-                    <a:bodyPr/>
-                    <a:lstStyle/>
-                    <a:p>
-                      <a:r>
-                        <a:rPr lang="en-GB" sz="400"/>
-                        <a:t>Multiple variants can progress into </a:t>
-                      </a:r>
-                      <a:r>
-                        <a:rPr lang="en-GB" sz="400" b="1"/>
-                        <a:t>DLT/Silverish/Silver</a:t>
-                      </a:r>
-                      <a:r>
-                        <a:rPr lang="en-GB" sz="400"/>
-                        <a:t> and become visible in </a:t>
-                      </a:r>
-                      <a:r>
-                        <a:rPr lang="en-GB" sz="400" b="1"/>
-                        <a:t>Pricing ART views</a:t>
-                      </a:r>
-                      <a:r>
-                        <a:rPr lang="en-GB" sz="400"/>
-                        <a:t>. Source needs to define which business event/quoteStep is valid before BICoE can safely apply additional filtering.</a:t>
-                      </a:r>
-                    </a:p>
-                  </a:txBody>
-                  <a:tcPr marL="18837" marR="18837" marT="9418" marB="9418" anchor="ctr">
-                    <a:lnL>
-                      <a:noFill/>
-                    </a:lnL>
-                    <a:lnR>
-                      <a:noFill/>
-                    </a:lnR>
-                    <a:lnT>
-                      <a:noFill/>
-                    </a:lnT>
-                    <a:lnB>
-                      <a:noFill/>
-                    </a:lnB>
-                  </a:tcPr>
-                </a:tc>
-                <a:extLst>
-                  <a:ext uri="{0D108BD9-81ED-4DB2-BD59-A6C34878D82A}">
-                    <a16:rowId xmlns:a16="http://schemas.microsoft.com/office/drawing/2014/main" val="3914321941"/>
-                  </a:ext>
-                </a:extLst>
-              </a:tr>
-              <a:tr h="895910">
-                <a:tc>
-                  <a:txBody>
-                    <a:bodyPr/>
-                    <a:lstStyle/>
-                    <a:p>
-                      <a:r>
-                        <a:rPr lang="en-GB" sz="400" b="1"/>
-                        <a:t>4</a:t>
-                      </a:r>
-                      <a:endParaRPr lang="en-GB" sz="400"/>
-                    </a:p>
-                  </a:txBody>
-                  <a:tcPr marL="18837" marR="18837" marT="9418" marB="9418" anchor="ctr">
-                    <a:lnL>
-                      <a:noFill/>
-                    </a:lnL>
-                    <a:lnR>
-                      <a:noFill/>
-                    </a:lnR>
-                    <a:lnT>
-                      <a:noFill/>
-                    </a:lnT>
-                    <a:lnB>
-                      <a:noFill/>
-                    </a:lnB>
-                  </a:tcPr>
-                </a:tc>
-                <a:tc>
-                  <a:txBody>
-                    <a:bodyPr/>
-                    <a:lstStyle/>
-                    <a:p>
-                      <a:r>
-                        <a:rPr lang="en-GB" sz="400" b="1"/>
-                        <a:t>Historical data-load / backfill duplicate</a:t>
-                      </a:r>
-                      <a:endParaRPr lang="en-GB" sz="400"/>
-                    </a:p>
-                  </a:txBody>
-                  <a:tcPr marL="18837" marR="18837" marT="9418" marB="9418" anchor="ctr">
-                    <a:lnL>
-                      <a:noFill/>
-                    </a:lnL>
-                    <a:lnR>
-                      <a:noFill/>
-                    </a:lnR>
-                    <a:lnT>
-                      <a:noFill/>
-                    </a:lnT>
-                    <a:lnB>
-                      <a:noFill/>
-                    </a:lnB>
-                  </a:tcPr>
-                </a:tc>
-                <a:tc>
-                  <a:txBody>
-                    <a:bodyPr/>
-                    <a:lstStyle/>
-                    <a:p>
-                      <a:r>
-                        <a:rPr lang="en-GB" sz="400"/>
-                        <a:t>During the 30 July header-issue recovery, historical data retained in the temporary landing path was processed more than once before the revised deduplication control was fully applied.</a:t>
-                      </a:r>
-                    </a:p>
-                  </a:txBody>
-                  <a:tcPr marL="18837" marR="18837" marT="9418" marB="9418" anchor="ctr">
-                    <a:lnL>
-                      <a:noFill/>
-                    </a:lnL>
-                    <a:lnR>
-                      <a:noFill/>
-                    </a:lnR>
-                    <a:lnT>
-                      <a:noFill/>
-                    </a:lnT>
-                    <a:lnB>
-                      <a:noFill/>
-                    </a:lnB>
-                  </a:tcPr>
-                </a:tc>
-                <a:tc>
-                  <a:txBody>
-                    <a:bodyPr/>
-                    <a:lstStyle/>
-                    <a:p>
-                      <a:r>
-                        <a:rPr lang="en-GB" sz="400" b="1"/>
-                        <a:t>One-off BICoE recovery/data-load issue</a:t>
-                      </a:r>
-                      <a:r>
-                        <a:rPr lang="en-GB" sz="400"/>
-                        <a:t>, associated with the header incident and temporary-data reprocessing. It is different from normal live replay.</a:t>
-                      </a:r>
-                    </a:p>
-                  </a:txBody>
-                  <a:tcPr marL="18837" marR="18837" marT="9418" marB="9418" anchor="ctr">
-                    <a:lnL>
-                      <a:noFill/>
-                    </a:lnL>
-                    <a:lnR>
-                      <a:noFill/>
-                    </a:lnR>
-                    <a:lnT>
-                      <a:noFill/>
-                    </a:lnT>
-                    <a:lnB>
-                      <a:noFill/>
-                    </a:lnB>
-                  </a:tcPr>
-                </a:tc>
-                <a:tc>
-                  <a:txBody>
-                    <a:bodyPr/>
-                    <a:lstStyle/>
-                    <a:p>
-                      <a:r>
-                        <a:rPr lang="en-GB" sz="400" b="1"/>
-                        <a:t>Not captured by the normal ingestion deduplication path</a:t>
-                      </a:r>
-                      <a:r>
-                        <a:rPr lang="en-GB" sz="400"/>
-                        <a:t> because the duplicate was introduced through the exceptional historical reload/reprocessing activity.</a:t>
-                      </a:r>
-                    </a:p>
-                  </a:txBody>
-                  <a:tcPr marL="18837" marR="18837" marT="9418" marB="9418" anchor="ctr">
-                    <a:lnL>
-                      <a:noFill/>
-                    </a:lnL>
-                    <a:lnR>
-                      <a:noFill/>
-                    </a:lnR>
-                    <a:lnT>
-                      <a:noFill/>
-                    </a:lnT>
-                    <a:lnB>
-                      <a:noFill/>
-                    </a:lnB>
-                  </a:tcPr>
-                </a:tc>
-                <a:tc>
-                  <a:txBody>
-                    <a:bodyPr/>
-                    <a:lstStyle/>
-                    <a:p>
-                      <a:r>
-                        <a:rPr lang="en-GB" sz="400"/>
-                        <a:t>Historical duplicates progressed into </a:t>
-                      </a:r>
-                      <a:r>
-                        <a:rPr lang="en-GB" sz="400" b="1"/>
-                        <a:t>Bronze DLT, Silverish/Silver and enrichment data</a:t>
-                      </a:r>
-                      <a:r>
-                        <a:rPr lang="en-GB" sz="400"/>
-                        <a:t>. They can also cause </a:t>
-                      </a:r>
-                      <a:r>
-                        <a:rPr lang="en-GB" sz="400" b="1"/>
-                        <a:t>DVLA retention MERGE conflicts and pipeline failure</a:t>
-                      </a:r>
-                      <a:r>
-                        <a:rPr lang="en-GB" sz="400"/>
-                        <a:t>. Requires finite one-off cleanup.</a:t>
-                      </a:r>
-                    </a:p>
-                  </a:txBody>
-                  <a:tcPr marL="18837" marR="18837" marT="9418" marB="9418" anchor="ctr">
-                    <a:lnL>
-                      <a:noFill/>
-                    </a:lnL>
-                    <a:lnR>
-                      <a:noFill/>
-                    </a:lnR>
-                    <a:lnT>
-                      <a:noFill/>
-                    </a:lnT>
-                    <a:lnB>
-                      <a:noFill/>
-                    </a:lnB>
-                  </a:tcPr>
-                </a:tc>
-                <a:extLst>
-                  <a:ext uri="{0D108BD9-81ED-4DB2-BD59-A6C34878D82A}">
-                    <a16:rowId xmlns:a16="http://schemas.microsoft.com/office/drawing/2014/main" val="2182227563"/>
-                  </a:ext>
-                </a:extLst>
-              </a:tr>
-              <a:tr h="770900">
-                <a:tc>
-                  <a:txBody>
-                    <a:bodyPr/>
-                    <a:lstStyle/>
-                    <a:p>
-                      <a:r>
-                        <a:rPr lang="en-GB" sz="400" b="1"/>
-                        <a:t>5</a:t>
-                      </a:r>
-                      <a:endParaRPr lang="en-GB" sz="400"/>
-                    </a:p>
-                  </a:txBody>
-                  <a:tcPr marL="18837" marR="18837" marT="9418" marB="9418" anchor="ctr">
-                    <a:lnL>
-                      <a:noFill/>
-                    </a:lnL>
-                    <a:lnR>
-                      <a:noFill/>
-                    </a:lnR>
-                    <a:lnT>
-                      <a:noFill/>
-                    </a:lnT>
-                    <a:lnB>
-                      <a:noFill/>
-                    </a:lnB>
-                  </a:tcPr>
-                </a:tc>
-                <a:tc>
-                  <a:txBody>
-                    <a:bodyPr/>
-                    <a:lstStyle/>
-                    <a:p>
-                      <a:r>
-                        <a:rPr lang="en-GB" sz="400" b="1"/>
-                        <a:t>Exact duplicate replay</a:t>
-                      </a:r>
-                      <a:endParaRPr lang="en-GB" sz="400"/>
-                    </a:p>
-                  </a:txBody>
-                  <a:tcPr marL="18837" marR="18837" marT="9418" marB="9418" anchor="ctr">
-                    <a:lnL>
-                      <a:noFill/>
-                    </a:lnL>
-                    <a:lnR>
-                      <a:noFill/>
-                    </a:lnR>
-                    <a:lnT>
-                      <a:noFill/>
-                    </a:lnT>
-                    <a:lnB>
-                      <a:noFill/>
-                    </a:lnB>
-                  </a:tcPr>
-                </a:tc>
-                <a:tc>
-                  <a:txBody>
-                    <a:bodyPr/>
-                    <a:lstStyle/>
-                    <a:p>
-                      <a:r>
-                        <a:rPr lang="en-GB" sz="400"/>
-                        <a:t>Two physically identical copies of the same message arrive, including the same business data and matching enqueue-related timestamps.</a:t>
-                      </a:r>
-                    </a:p>
-                  </a:txBody>
-                  <a:tcPr marL="18837" marR="18837" marT="9418" marB="9418" anchor="ctr">
-                    <a:lnL>
-                      <a:noFill/>
-                    </a:lnL>
-                    <a:lnR>
-                      <a:noFill/>
-                    </a:lnR>
-                    <a:lnT>
-                      <a:noFill/>
-                    </a:lnT>
-                    <a:lnB>
-                      <a:noFill/>
-                    </a:lnB>
-                  </a:tcPr>
-                </a:tc>
-                <a:tc>
-                  <a:txBody>
-                    <a:bodyPr/>
-                    <a:lstStyle/>
-                    <a:p>
-                      <a:r>
-                        <a:rPr lang="en-GB" sz="400"/>
-                        <a:t>Exact upstream duplicate/replay behaviour.</a:t>
-                      </a:r>
-                    </a:p>
-                  </a:txBody>
-                  <a:tcPr marL="18837" marR="18837" marT="9418" marB="9418" anchor="ctr">
-                    <a:lnL>
-                      <a:noFill/>
-                    </a:lnL>
-                    <a:lnR>
-                      <a:noFill/>
-                    </a:lnR>
-                    <a:lnT>
-                      <a:noFill/>
-                    </a:lnT>
-                    <a:lnB>
-                      <a:noFill/>
-                    </a:lnB>
-                  </a:tcPr>
-                </a:tc>
-                <a:tc>
-                  <a:txBody>
-                    <a:bodyPr/>
-                    <a:lstStyle/>
-                    <a:p>
-                      <a:r>
-                        <a:rPr lang="en-GB" sz="400" b="1"/>
-                        <a:t>Handled by the current normal ingestion deduplication.</a:t>
-                      </a:r>
-                      <a:endParaRPr lang="en-GB" sz="400"/>
-                    </a:p>
-                  </a:txBody>
-                  <a:tcPr marL="18837" marR="18837" marT="9418" marB="9418" anchor="ctr">
-                    <a:lnL>
-                      <a:noFill/>
-                    </a:lnL>
-                    <a:lnR>
-                      <a:noFill/>
-                    </a:lnR>
-                    <a:lnT>
-                      <a:noFill/>
-                    </a:lnT>
-                    <a:lnB>
-                      <a:noFill/>
-                    </a:lnB>
-                  </a:tcPr>
-                </a:tc>
-                <a:tc>
-                  <a:txBody>
-                    <a:bodyPr/>
-                    <a:lstStyle/>
-                    <a:p>
-                      <a:r>
-                        <a:rPr lang="en-GB" sz="400" dirty="0"/>
-                        <a:t>Duplicate may exist in Event Hub/EFST, but </a:t>
-                      </a:r>
-                      <a:r>
-                        <a:rPr lang="en-GB" sz="400" b="1" dirty="0"/>
-                        <a:t>no expected downstream duplicate impact</a:t>
-                      </a:r>
-                      <a:r>
-                        <a:rPr lang="en-GB" sz="400" dirty="0"/>
-                        <a:t> if ingestion deduplication continues to contain the pattern.</a:t>
-                      </a:r>
-                    </a:p>
-                  </a:txBody>
-                  <a:tcPr marL="18837" marR="18837" marT="9418" marB="9418" anchor="ctr">
-                    <a:lnL>
-                      <a:noFill/>
-                    </a:lnL>
-                    <a:lnR>
-                      <a:noFill/>
-                    </a:lnR>
-                    <a:lnT>
-                      <a:noFill/>
-                    </a:lnT>
-                    <a:lnB>
-                      <a:noFill/>
-                    </a:lnB>
-                  </a:tcPr>
-                </a:tc>
-                <a:extLst>
-                  <a:ext uri="{0D108BD9-81ED-4DB2-BD59-A6C34878D82A}">
-                    <a16:rowId xmlns:a16="http://schemas.microsoft.com/office/drawing/2014/main" val="3145061465"/>
-                  </a:ext>
-                </a:extLst>
-              </a:tr>
-            </a:tbl>
-          </a:graphicData>
-        </a:graphic>
-      </p:graphicFrame>
+      <p:sp>
+        <p:nvSpPr>
+          <p:cNvPr id="5" name="Rectangle 4">
+            <a:extLst>
+              <a:ext uri="{FF2B5EF4-FFF2-40B4-BE49-F238E27FC236}">
+                <a16:creationId xmlns:a16="http://schemas.microsoft.com/office/drawing/2014/main" id="{4B27143E-A1B2-D84A-B7CC-658534640C58}"/>
+              </a:ext>
+            </a:extLst>
+          </p:cNvPr>
+          <p:cNvSpPr/>
+          <p:nvPr/>
+        </p:nvSpPr>
+        <p:spPr>
+          <a:xfrm>
+            <a:off x="3048000" y="-5758130"/>
+            <a:ext cx="6096000" cy="18374261"/>
+          </a:xfrm>
+          <a:prstGeom prst="rect">
+            <a:avLst/>
+          </a:prstGeom>
+        </p:spPr>
+        <p:txBody>
+          <a:bodyPr>
+            <a:spAutoFit/>
+          </a:bodyPr>
+          <a:lstStyle/>
+          <a:p>
+            <a:r>
+              <a:rPr lang="en-GB" dirty="0"/>
+              <a:t>Hi Team,</a:t>
+            </a:r>
+          </a:p>
+          <a:p>
+            <a:r>
+              <a:rPr lang="en-GB" dirty="0"/>
+              <a:t>Below are the activities we need to work through to agree the reconciliation testing approach for CDA vs Read Replica.</a:t>
+            </a:r>
+          </a:p>
+          <a:p>
+            <a:r>
+              <a:rPr lang="en-GB" b="1" dirty="0"/>
+              <a:t>1. Manual Testing</a:t>
+            </a:r>
+            <a:endParaRPr lang="en-GB" dirty="0"/>
+          </a:p>
+          <a:p>
+            <a:pPr>
+              <a:buFont typeface="+mj-lt"/>
+              <a:buAutoNum type="arabicPeriod"/>
+            </a:pPr>
+            <a:r>
+              <a:rPr lang="en-GB" b="1" dirty="0"/>
+              <a:t>Scope confirmation:</a:t>
+            </a:r>
+            <a:r>
+              <a:rPr lang="en-GB" dirty="0"/>
+              <a:t> So far, we have identified 59 tables/views from PC and BC. Stefan to follow up with Simon on the CC scope. Once confirmed, we need to review internally whether the selected tables provide sufficient coverage.</a:t>
+            </a:r>
+          </a:p>
+          <a:p>
+            <a:pPr>
+              <a:buFont typeface="+mj-lt"/>
+              <a:buAutoNum type="arabicPeriod"/>
+            </a:pPr>
+            <a:r>
+              <a:rPr lang="en-GB" b="1" dirty="0"/>
+              <a:t>Insert views and downstream usage:</a:t>
+            </a:r>
+            <a:r>
+              <a:rPr lang="en-GB" dirty="0"/>
+              <a:t> For the identified insert views that do not have corresponding Silver tables, we need to check when they were last used. Based on the findings, we will discuss with Trevor, Glenn, Phil and the wider CDA team to understand whether these are still used by any downstream processes or reporting.</a:t>
+            </a:r>
+          </a:p>
+          <a:p>
+            <a:pPr>
+              <a:buFont typeface="+mj-lt"/>
+              <a:buAutoNum type="arabicPeriod"/>
+            </a:pPr>
+            <a:r>
+              <a:rPr lang="en-GB" b="1" dirty="0"/>
+              <a:t>Test scenarios:</a:t>
+            </a:r>
+            <a:r>
+              <a:rPr lang="en-GB" dirty="0"/>
+              <a:t> Identify the key business scenarios for the selected tables, including inserts, updates, hard deletes and same day insert/delete transactions. We also need to discuss whether historical data validation should be included.</a:t>
+            </a:r>
+          </a:p>
+          <a:p>
+            <a:pPr>
+              <a:buFont typeface="+mj-lt"/>
+              <a:buAutoNum type="arabicPeriod"/>
+            </a:pPr>
+            <a:r>
+              <a:rPr lang="en-GB" b="1" dirty="0"/>
+              <a:t>Rollback testing:</a:t>
+            </a:r>
+            <a:r>
+              <a:rPr lang="en-GB" dirty="0"/>
+              <a:t> Understand and agree the rollback mechanism with the development team. Based on this, identify the scenarios we need to cover, including data consistency, recovery and any downstream impact following rollback.</a:t>
+            </a:r>
+          </a:p>
+          <a:p>
+            <a:pPr>
+              <a:buFont typeface="+mj-lt"/>
+              <a:buAutoNum type="arabicPeriod"/>
+            </a:pPr>
+            <a:r>
+              <a:rPr lang="en-GB" b="1" dirty="0"/>
+              <a:t>Test data and review:</a:t>
+            </a:r>
+            <a:r>
+              <a:rPr lang="en-GB" dirty="0"/>
+              <a:t> Review the proposed scenarios internally and identify suitable production records for validation between CDA and Read Replica.</a:t>
+            </a:r>
+          </a:p>
+          <a:p>
+            <a:r>
+              <a:rPr lang="en-GB" b="1" dirty="0"/>
+              <a:t>2. Automation Testing</a:t>
+            </a:r>
+            <a:endParaRPr lang="en-GB" dirty="0"/>
+          </a:p>
+          <a:p>
+            <a:pPr>
+              <a:buFont typeface="+mj-lt"/>
+              <a:buAutoNum type="arabicPeriod"/>
+            </a:pPr>
+            <a:r>
+              <a:rPr lang="en-GB" b="1" dirty="0"/>
+              <a:t>Volume assessment:</a:t>
+            </a:r>
+            <a:r>
+              <a:rPr lang="en-GB" dirty="0"/>
+              <a:t> For the 178 identified tables/views, capture the average data volumes over the last five days. We should also consider peak processing days to understand the potential impact on execution time.</a:t>
+            </a:r>
+          </a:p>
+          <a:p>
+            <a:pPr>
+              <a:buFont typeface="+mj-lt"/>
+              <a:buAutoNum type="arabicPeriod"/>
+            </a:pPr>
+            <a:r>
+              <a:rPr lang="en-GB" b="1" dirty="0"/>
+              <a:t>Benchmarking:</a:t>
+            </a:r>
+            <a:r>
+              <a:rPr lang="en-GB" dirty="0"/>
+              <a:t> Run count, data format and detailed data comparisons on a sample of tables with different data volumes. Capture the time taken and compute requirements to understand how the framework performs.</a:t>
+            </a:r>
+          </a:p>
+          <a:p>
+            <a:pPr>
+              <a:buFont typeface="+mj-lt"/>
+              <a:buAutoNum type="arabicPeriod"/>
+            </a:pPr>
+            <a:r>
+              <a:rPr lang="en-GB" b="1" dirty="0"/>
+              <a:t>Automation coverage:</a:t>
+            </a:r>
+            <a:r>
+              <a:rPr lang="en-GB" dirty="0"/>
+              <a:t> Based on the benchmark results, assess how many tables we can realistically cover in an automation run. We also need to discuss whether full or incremental comparisons would be more practical for high volume tables.</a:t>
+            </a:r>
+          </a:p>
+          <a:p>
+            <a:pPr>
+              <a:buFont typeface="+mj-lt"/>
+              <a:buAutoNum type="arabicPeriod"/>
+            </a:pPr>
+            <a:r>
+              <a:rPr lang="en-GB" b="1" dirty="0"/>
+              <a:t>Framework effort:</a:t>
+            </a:r>
+            <a:r>
+              <a:rPr lang="en-GB" dirty="0"/>
+              <a:t> Identify any changes required to the existing automation framework and estimate the effort involved.</a:t>
+            </a:r>
+          </a:p>
+          <a:p>
+            <a:pPr>
+              <a:buFont typeface="+mj-lt"/>
+              <a:buAutoNum type="arabicPeriod"/>
+            </a:pPr>
+            <a:r>
+              <a:rPr lang="en-GB" b="1" dirty="0"/>
+              <a:t>Acceptance criteria:</a:t>
+            </a:r>
+            <a:r>
+              <a:rPr lang="en-GB" dirty="0"/>
+              <a:t> Discuss and agree how count differences, data mismatches and known exceptions should be handled.</a:t>
+            </a:r>
+          </a:p>
+          <a:p>
+            <a:r>
+              <a:rPr lang="en-GB" b="1" dirty="0"/>
+              <a:t>3. Points to Clarify with Development</a:t>
+            </a:r>
+            <a:endParaRPr lang="en-GB" dirty="0"/>
+          </a:p>
+          <a:p>
+            <a:pPr>
+              <a:buFont typeface="+mj-lt"/>
+              <a:buAutoNum type="arabicPeriod"/>
+            </a:pPr>
+            <a:r>
+              <a:rPr lang="en-GB" dirty="0"/>
+              <a:t>Confirm the appropriate comparison points between RR and CDA, particularly for ODS views, insert views and Silver tables.</a:t>
+            </a:r>
+          </a:p>
+          <a:p>
+            <a:pPr>
+              <a:buFont typeface="+mj-lt"/>
+              <a:buAutoNum type="arabicPeriod"/>
+            </a:pPr>
+            <a:r>
+              <a:rPr lang="en-GB" dirty="0"/>
+              <a:t>Agree whether we need to compare current records only or historical changes as well.</a:t>
+            </a:r>
+          </a:p>
+          <a:p>
+            <a:pPr>
+              <a:buFont typeface="+mj-lt"/>
+              <a:buAutoNum type="arabicPeriod"/>
+            </a:pPr>
+            <a:r>
+              <a:rPr lang="en-GB" dirty="0"/>
+              <a:t>Understand how we can align the data between both flows, considering ingestion delays and daily load timings.</a:t>
+            </a:r>
+          </a:p>
+          <a:p>
+            <a:pPr>
+              <a:buFont typeface="+mj-lt"/>
+              <a:buAutoNum type="arabicPeriod"/>
+            </a:pPr>
+            <a:r>
+              <a:rPr lang="en-GB" dirty="0"/>
+              <a:t>Confirm the expected CDC behaviour and how known differences between RR and CDA should be treated during reconciliation.</a:t>
+            </a:r>
+          </a:p>
+          <a:p>
+            <a:pPr>
+              <a:buFont typeface="+mj-lt"/>
+              <a:buAutoNum type="arabicPeriod"/>
+            </a:pPr>
+            <a:r>
+              <a:rPr lang="en-GB" dirty="0"/>
+              <a:t>Clarify the rollback approach and what needs to be validated as part of switch over testing.</a:t>
+            </a:r>
+          </a:p>
+          <a:p>
+            <a:r>
+              <a:rPr lang="en-GB" b="1" dirty="0"/>
+              <a:t>4. Next Steps</a:t>
+            </a:r>
+            <a:endParaRPr lang="en-GB" dirty="0"/>
+          </a:p>
+          <a:p>
+            <a:r>
+              <a:rPr lang="en-GB" dirty="0"/>
+              <a:t>Once we have completed the initial scope review and automation benchmarking, we can consolidate the findings and review the proposed approach internally.</a:t>
+            </a:r>
+          </a:p>
+          <a:p>
+            <a:r>
+              <a:rPr lang="en-GB" dirty="0"/>
+              <a:t>Following that, we can take it through with Field Lane, Simon and Trevor to agree the overall testing approach, outstanding dependencies and effort required.</a:t>
+            </a:r>
+          </a:p>
+          <a:p>
+            <a:r>
+              <a:rPr lang="en-GB"/>
+              <a:t>Please add anything I may have missed or any other dependencies we should consider.</a:t>
+            </a:r>
+          </a:p>
+        </p:txBody>
+      </p:sp>
     </p:spTree>
     <p:extLst>
       <p:ext uri="{BB962C8B-B14F-4D97-AF65-F5344CB8AC3E}">
